--- a/modulo-04/04.04 - Aprofundando no Modelo de Extensibilidade do S_4HANA Cloud/04.04_O_modelo_de_extensibilidade_do_S4HANA_Cloud.pptx
+++ b/modulo-04/04.04 - Aprofundando no Modelo de Extensibilidade do S_4HANA Cloud/04.04_O_modelo_de_extensibilidade_do_S4HANA_Cloud.pptx
@@ -1906,7 +1906,7 @@
                   <a:srgbClr val="8FA3C7"/>
                 </a:solidFill>
               </a:rPr>
-              <a:t>ABAP Moderno · Módulo 05 — Extensibilidade Clean Core  ·  Aula 4 de 5 — Modelo de extensibilidade</a:t>
+              <a:t>ABAP Moderno · Módulo 04 — Extensibilidade Clean Core  ·  Aula 4 de 5 — Modelo de extensibilidade</a:t>
             </a:r>
             <a:endParaRPr lang="en-US" sz="900" dirty="0"/>
           </a:p>
@@ -2052,7 +2052,7 @@
                   <a:srgbClr val="556B82"/>
                 </a:solidFill>
               </a:rPr>
-              <a:t>ABAP Moderno · Módulo 05 — Extensibilidade Clean Core  ·  Aula 4 de 5 — Modelo de extensibilidade</a:t>
+              <a:t>ABAP Moderno · Módulo 04 — Extensibilidade Clean Core  ·  Aula 4 de 5 — Modelo de extensibilidade</a:t>
             </a:r>
             <a:endParaRPr lang="en-US" sz="900" dirty="0"/>
           </a:p>
@@ -2483,7 +2483,7 @@
                   <a:srgbClr val="89D1FF"/>
                 </a:solidFill>
               </a:rPr>
-              <a:t>MÓDULO 05 · AULA 04 DE 05</a:t>
+              <a:t>MÓDULO 04 · AULA 04 DE 05</a:t>
             </a:r>
             <a:endParaRPr lang="en-US" sz="1400" dirty="0"/>
           </a:p>
@@ -2781,7 +2781,7 @@
                   <a:srgbClr val="8FA3C7"/>
                 </a:solidFill>
               </a:rPr>
-              <a:t>ABAP Moderno · Módulo 05 — Extensibilidade Clean Core · Design System SAP Horizon</a:t>
+              <a:t>ABAP Moderno · Módulo 04 — Extensibilidade Clean Core · Design System SAP Horizon</a:t>
             </a:r>
             <a:endParaRPr lang="en-US" sz="1100" dirty="0"/>
           </a:p>
@@ -4142,7 +4142,7 @@
                   <a:srgbClr val="89D1FF"/>
                 </a:solidFill>
               </a:rPr>
-              <a:t>AULA 05.04 · SEÇÃO 4</a:t>
+              <a:t>AULA 04.04 · SEÇÃO 4</a:t>
             </a:r>
             <a:endParaRPr lang="en-US" sz="1300" dirty="0"/>
           </a:p>
@@ -5032,7 +5032,7 @@
         </p:blipFill>
         <p:spPr>
           <a:xfrm>
-            <a:off x="850392" y="2876042"/>
+            <a:off x="4624730" y="2876042"/>
             <a:ext cx="256032" cy="256032"/>
           </a:xfrm>
           <a:prstGeom prst="rect">
@@ -5056,8 +5056,8 @@
         </p:blipFill>
         <p:spPr>
           <a:xfrm>
-            <a:off x="749808" y="4804918"/>
-            <a:ext cx="310896" cy="310896"/>
+            <a:off x="850392" y="2876042"/>
+            <a:ext cx="256032" cy="256032"/>
           </a:xfrm>
           <a:prstGeom prst="rect">
             <a:avLst/>
@@ -5104,8 +5104,8 @@
         </p:blipFill>
         <p:spPr>
           <a:xfrm>
-            <a:off x="4624730" y="2876042"/>
-            <a:ext cx="256032" cy="256032"/>
+            <a:off x="749808" y="4804918"/>
+            <a:ext cx="310896" cy="310896"/>
           </a:xfrm>
           <a:prstGeom prst="rect">
             <a:avLst/>
@@ -5786,7 +5786,7 @@
                   <a:srgbClr val="1D2D3E"/>
                 </a:solidFill>
               </a:rPr>
-              <a:t> do Clean Core classificam cada extensão (aula 05.05).</a:t>
+              <a:t> do Clean Core classificam cada extensão (aula 04.05).</a:t>
             </a:r>
             <a:endParaRPr lang="en-US" sz="1400" dirty="0"/>
           </a:p>
@@ -5808,8 +5808,8 @@
         </p:blipFill>
         <p:spPr>
           <a:xfrm>
-            <a:off x="3564026" y="3369564"/>
-            <a:ext cx="329184" cy="329184"/>
+            <a:off x="749808" y="5033772"/>
+            <a:ext cx="310896" cy="310896"/>
           </a:xfrm>
           <a:prstGeom prst="rect">
             <a:avLst/>
@@ -5832,8 +5832,8 @@
         </p:blipFill>
         <p:spPr>
           <a:xfrm>
-            <a:off x="749808" y="5033772"/>
-            <a:ext cx="310896" cy="310896"/>
+            <a:off x="3564026" y="3369564"/>
+            <a:ext cx="329184" cy="329184"/>
           </a:xfrm>
           <a:prstGeom prst="rect">
             <a:avLst/>
@@ -6024,7 +6024,7 @@
                   <a:srgbClr val="FFFFFF"/>
                 </a:solidFill>
               </a:rPr>
-              <a:t>O que aprendemos na aula 05.04</a:t>
+              <a:t>O que aprendemos na aula 04.04</a:t>
             </a:r>
             <a:endParaRPr lang="en-US" sz="3200" dirty="0"/>
           </a:p>
@@ -6534,7 +6534,7 @@
                   <a:srgbClr val="89D1FF"/>
                 </a:solidFill>
               </a:rPr>
-              <a:t>Próxima aula · 05.05  </a:t>
+              <a:t>Próxima aula · 04.05  </a:t>
             </a:r>
             <a:r>
               <a:rPr lang="en-US" sz="1500" dirty="0">
@@ -6612,7 +6612,7 @@
         </p:blipFill>
         <p:spPr>
           <a:xfrm>
-            <a:off x="822960" y="3886200"/>
+            <a:off x="822960" y="2926080"/>
             <a:ext cx="256032" cy="256032"/>
           </a:xfrm>
           <a:prstGeom prst="rect">
@@ -6636,7 +6636,7 @@
         </p:blipFill>
         <p:spPr>
           <a:xfrm>
-            <a:off x="6355080" y="2926080"/>
+            <a:off x="822960" y="3886200"/>
             <a:ext cx="256032" cy="256032"/>
           </a:xfrm>
           <a:prstGeom prst="rect">
@@ -6660,7 +6660,7 @@
         </p:blipFill>
         <p:spPr>
           <a:xfrm>
-            <a:off x="822960" y="2926080"/>
+            <a:off x="6355080" y="2926080"/>
             <a:ext cx="256032" cy="256032"/>
           </a:xfrm>
           <a:prstGeom prst="rect">
@@ -6811,7 +6811,7 @@
                   <a:srgbClr val="1D2D3E"/>
                 </a:solidFill>
               </a:rPr>
-              <a:t>Módulo 05 em 5 aulas: Clean Core e extensibilidade</a:t>
+              <a:t>Módulo 04 em 5 aulas: Clean Core e extensibilidade</a:t>
             </a:r>
             <a:endParaRPr lang="en-US" sz="2800" dirty="0"/>
           </a:p>
@@ -7791,7 +7791,7 @@
         </p:blipFill>
         <p:spPr>
           <a:xfrm>
-            <a:off x="4328038" y="1847088"/>
+            <a:off x="8838956" y="1847088"/>
             <a:ext cx="347472" cy="347472"/>
           </a:xfrm>
           <a:prstGeom prst="rect">
@@ -7839,7 +7839,7 @@
         </p:blipFill>
         <p:spPr>
           <a:xfrm>
-            <a:off x="8838956" y="1847088"/>
+            <a:off x="11094415" y="1847088"/>
             <a:ext cx="347472" cy="347472"/>
           </a:xfrm>
           <a:prstGeom prst="rect">
@@ -7863,7 +7863,7 @@
         </p:blipFill>
         <p:spPr>
           <a:xfrm>
-            <a:off x="11094415" y="1847088"/>
+            <a:off x="4328038" y="1847088"/>
             <a:ext cx="347472" cy="347472"/>
           </a:xfrm>
           <a:prstGeom prst="rect">
@@ -8752,7 +8752,7 @@
                   <a:srgbClr val="89D1FF"/>
                 </a:solidFill>
               </a:rPr>
-              <a:t>AULA 05.04 · SEÇÃO 1</a:t>
+              <a:t>AULA 04.04 · SEÇÃO 1</a:t>
             </a:r>
             <a:endParaRPr lang="en-US" sz="1300" dirty="0"/>
           </a:p>
@@ -9893,7 +9893,7 @@
         </p:blipFill>
         <p:spPr>
           <a:xfrm>
-            <a:off x="2077669" y="2084832"/>
+            <a:off x="5912968" y="2084832"/>
             <a:ext cx="365760" cy="365760"/>
           </a:xfrm>
           <a:prstGeom prst="rect">
@@ -9917,7 +9917,7 @@
         </p:blipFill>
         <p:spPr>
           <a:xfrm>
-            <a:off x="5912968" y="2084832"/>
+            <a:off x="2077669" y="2084832"/>
             <a:ext cx="365760" cy="365760"/>
           </a:xfrm>
           <a:prstGeom prst="rect">
@@ -9941,8 +9941,8 @@
         </p:blipFill>
         <p:spPr>
           <a:xfrm>
-            <a:off x="9748266" y="2084832"/>
-            <a:ext cx="365760" cy="365760"/>
+            <a:off x="820034" y="3928994"/>
+            <a:ext cx="225308" cy="225308"/>
           </a:xfrm>
           <a:prstGeom prst="rect">
             <a:avLst/>
@@ -9965,8 +9965,8 @@
         </p:blipFill>
         <p:spPr>
           <a:xfrm>
-            <a:off x="820034" y="3928994"/>
-            <a:ext cx="225308" cy="225308"/>
+            <a:off x="9748266" y="2084832"/>
+            <a:ext cx="365760" cy="365760"/>
           </a:xfrm>
           <a:prstGeom prst="rect">
             <a:avLst/>
@@ -10143,7 +10143,7 @@
                   <a:srgbClr val="89D1FF"/>
                 </a:solidFill>
               </a:rPr>
-              <a:t>AULA 05.04 · SEÇÃO 2</a:t>
+              <a:t>AULA 04.04 · SEÇÃO 2</a:t>
             </a:r>
             <a:endParaRPr lang="en-US" sz="1300" dirty="0"/>
           </a:p>
@@ -11620,7 +11620,7 @@
                   <a:srgbClr val="89D1FF"/>
                 </a:solidFill>
               </a:rPr>
-              <a:t>AULA 05.04 · SEÇÃO 3</a:t>
+              <a:t>AULA 04.04 · SEÇÃO 3</a:t>
             </a:r>
             <a:endParaRPr lang="en-US" sz="1300" dirty="0"/>
           </a:p>
@@ -12526,8 +12526,8 @@
         </p:blipFill>
         <p:spPr>
           <a:xfrm>
-            <a:off x="850392" y="2876042"/>
-            <a:ext cx="256032" cy="256032"/>
+            <a:off x="749808" y="4804918"/>
+            <a:ext cx="310896" cy="310896"/>
           </a:xfrm>
           <a:prstGeom prst="rect">
             <a:avLst/>
@@ -12598,8 +12598,8 @@
         </p:blipFill>
         <p:spPr>
           <a:xfrm>
-            <a:off x="749808" y="4804918"/>
-            <a:ext cx="310896" cy="310896"/>
+            <a:off x="850392" y="2876042"/>
+            <a:ext cx="256032" cy="256032"/>
           </a:xfrm>
           <a:prstGeom prst="rect">
             <a:avLst/>
